--- a/docs/poster/variants/v28.pptx
+++ b/docs/poster/variants/v28.pptx
@@ -4221,6 +4221,90 @@
               </a:spcAft>
             </a:pPr>
             <a:r>
+              <a:rPr sz="6200" b="1">
+                <a:solidFill>
+                  <a:srgbClr val="1C6FB5"/>
+                </a:solidFill>
+                <a:latin typeface="Arial Narrow"/>
+              </a:rPr>
+              <a:t>1,389</a:t>
+            </a:r>
+          </a:p>
+        </p:txBody>
+      </p:sp>
+      <p:sp>
+        <p:nvSpPr>
+          <p:cNvPr id="29" name="TextBox 28"/>
+          <p:cNvSpPr txBox="1"/>
+          <p:nvPr/>
+        </p:nvSpPr>
+        <p:spPr>
+          <a:xfrm>
+            <a:off x="731520" y="11738864"/>
+            <a:ext cx="10607040" cy="365760"/>
+          </a:xfrm>
+          <a:prstGeom prst="rect">
+            <a:avLst/>
+          </a:prstGeom>
+          <a:noFill/>
+        </p:spPr>
+        <p:txBody>
+          <a:bodyPr wrap="square" lIns="0" rIns="0" tIns="0" bIns="0">
+            <a:spAutoFit/>
+          </a:bodyPr>
+          <a:lstStyle/>
+          <a:p>
+            <a:pPr algn="l">
+              <a:lnSpc>
+                <a:spcPct val="122000"/>
+              </a:lnSpc>
+              <a:spcAft>
+                <a:spcPts val="600"/>
+              </a:spcAft>
+            </a:pPr>
+            <a:r>
+              <a:rPr sz="1600" b="0">
+                <a:solidFill>
+                  <a:srgbClr val="556575"/>
+                </a:solidFill>
+                <a:latin typeface="Arial"/>
+              </a:rPr>
+              <a:t>joystick commands through the platform</a:t>
+            </a:r>
+          </a:p>
+        </p:txBody>
+      </p:sp>
+      <p:sp>
+        <p:nvSpPr>
+          <p:cNvPr id="30" name="TextBox 29"/>
+          <p:cNvSpPr txBox="1"/>
+          <p:nvPr/>
+        </p:nvSpPr>
+        <p:spPr>
+          <a:xfrm>
+            <a:off x="731520" y="12209272"/>
+            <a:ext cx="10607040" cy="365760"/>
+          </a:xfrm>
+          <a:prstGeom prst="rect">
+            <a:avLst/>
+          </a:prstGeom>
+          <a:noFill/>
+        </p:spPr>
+        <p:txBody>
+          <a:bodyPr wrap="square" lIns="0" rIns="0" tIns="0" bIns="0">
+            <a:spAutoFit/>
+          </a:bodyPr>
+          <a:lstStyle/>
+          <a:p>
+            <a:pPr algn="l">
+              <a:lnSpc>
+                <a:spcPct val="95000"/>
+              </a:lnSpc>
+              <a:spcAft>
+                <a:spcPts val="0"/>
+              </a:spcAft>
+            </a:pPr>
+            <a:r>
               <a:rPr sz="3400" b="1">
                 <a:solidFill>
                   <a:srgbClr val="14314E"/>
@@ -4234,13 +4318,13 @@
       </p:sp>
       <p:sp>
         <p:nvSpPr>
-          <p:cNvPr id="29" name="Rectangle 28"/>
+          <p:cNvPr id="31" name="Rectangle 30"/>
           <p:cNvSpPr/>
           <p:nvPr/>
         </p:nvSpPr>
         <p:spPr>
           <a:xfrm>
-            <a:off x="731520" y="11497056"/>
+            <a:off x="731520" y="12770612"/>
             <a:ext cx="10607040" cy="27432"/>
           </a:xfrm>
           <a:prstGeom prst="rect">
@@ -4278,13 +4362,13 @@
       </p:sp>
       <p:sp>
         <p:nvSpPr>
-          <p:cNvPr id="30" name="TextBox 29"/>
+          <p:cNvPr id="32" name="TextBox 31"/>
           <p:cNvSpPr txBox="1"/>
           <p:nvPr/>
         </p:nvSpPr>
         <p:spPr>
           <a:xfrm>
-            <a:off x="731520" y="11826239"/>
+            <a:off x="731520" y="13099796"/>
             <a:ext cx="10607040" cy="365760"/>
           </a:xfrm>
           <a:prstGeom prst="rect">
@@ -4320,13 +4404,13 @@
       </p:sp>
       <p:sp>
         <p:nvSpPr>
-          <p:cNvPr id="31" name="TextBox 30"/>
+          <p:cNvPr id="33" name="TextBox 32"/>
           <p:cNvSpPr txBox="1"/>
           <p:nvPr/>
         </p:nvSpPr>
         <p:spPr>
           <a:xfrm>
-            <a:off x="731520" y="13937487"/>
+            <a:off x="731520" y="15211044"/>
             <a:ext cx="10607040" cy="365760"/>
           </a:xfrm>
           <a:prstGeom prst="rect">
@@ -4362,13 +4446,13 @@
       </p:sp>
       <p:sp>
         <p:nvSpPr>
-          <p:cNvPr id="32" name="Rectangle 31"/>
+          <p:cNvPr id="34" name="Rectangle 33"/>
           <p:cNvSpPr/>
           <p:nvPr/>
         </p:nvSpPr>
         <p:spPr>
           <a:xfrm>
-            <a:off x="731520" y="14498827"/>
+            <a:off x="731520" y="15772384"/>
             <a:ext cx="10607040" cy="27432"/>
           </a:xfrm>
           <a:prstGeom prst="rect">
@@ -4406,7 +4490,7 @@
       </p:sp>
       <p:pic>
         <p:nvPicPr>
-          <p:cNvPr id="33" name="Picture 32" descr="l_robots.png"/>
+          <p:cNvPr id="35" name="Picture 34" descr="l_robots.png"/>
           <p:cNvPicPr>
             <a:picLocks noChangeAspect="1"/>
           </p:cNvPicPr>
@@ -4420,7 +4504,7 @@
         </p:blipFill>
         <p:spPr>
           <a:xfrm>
-            <a:off x="731520" y="14828012"/>
+            <a:off x="731520" y="16101568"/>
             <a:ext cx="10607040" cy="2377440"/>
           </a:xfrm>
           <a:prstGeom prst="rect">
@@ -4430,13 +4514,13 @@
       </p:pic>
       <p:sp>
         <p:nvSpPr>
-          <p:cNvPr id="34" name="TextBox 33"/>
+          <p:cNvPr id="36" name="TextBox 35"/>
           <p:cNvSpPr txBox="1"/>
           <p:nvPr/>
         </p:nvSpPr>
         <p:spPr>
           <a:xfrm>
-            <a:off x="731520" y="17315180"/>
+            <a:off x="731520" y="18588736"/>
             <a:ext cx="10607040" cy="365760"/>
           </a:xfrm>
           <a:prstGeom prst="rect">
@@ -4472,13 +4556,13 @@
       </p:sp>
       <p:sp>
         <p:nvSpPr>
-          <p:cNvPr id="35" name="TextBox 34"/>
+          <p:cNvPr id="37" name="TextBox 36"/>
           <p:cNvSpPr txBox="1"/>
           <p:nvPr/>
         </p:nvSpPr>
         <p:spPr>
           <a:xfrm>
-            <a:off x="731520" y="18585180"/>
+            <a:off x="731520" y="19858736"/>
             <a:ext cx="10607040" cy="365760"/>
           </a:xfrm>
           <a:prstGeom prst="rect">
@@ -4514,13 +4598,13 @@
       </p:sp>
       <p:sp>
         <p:nvSpPr>
-          <p:cNvPr id="36" name="TextBox 35"/>
+          <p:cNvPr id="38" name="TextBox 37"/>
           <p:cNvSpPr txBox="1"/>
           <p:nvPr/>
         </p:nvSpPr>
         <p:spPr>
           <a:xfrm>
-            <a:off x="731520" y="20076668"/>
+            <a:off x="731520" y="21350224"/>
             <a:ext cx="10607040" cy="365760"/>
           </a:xfrm>
           <a:prstGeom prst="rect">
@@ -4556,13 +4640,13 @@
       </p:sp>
       <p:sp>
         <p:nvSpPr>
-          <p:cNvPr id="37" name="Rectangle 36"/>
+          <p:cNvPr id="39" name="Rectangle 38"/>
           <p:cNvSpPr/>
           <p:nvPr/>
         </p:nvSpPr>
         <p:spPr>
           <a:xfrm>
-            <a:off x="731520" y="20638008"/>
+            <a:off x="731520" y="21911564"/>
             <a:ext cx="10607040" cy="27432"/>
           </a:xfrm>
           <a:prstGeom prst="rect">
@@ -4600,13 +4684,13 @@
       </p:sp>
       <p:sp>
         <p:nvSpPr>
-          <p:cNvPr id="38" name="TextBox 37"/>
+          <p:cNvPr id="40" name="TextBox 39"/>
           <p:cNvSpPr txBox="1"/>
           <p:nvPr/>
         </p:nvSpPr>
         <p:spPr>
           <a:xfrm>
-            <a:off x="731520" y="20967192"/>
+            <a:off x="731520" y="22240748"/>
             <a:ext cx="10607040" cy="365760"/>
           </a:xfrm>
           <a:prstGeom prst="rect">
@@ -4642,13 +4726,13 @@
       </p:sp>
       <p:sp>
         <p:nvSpPr>
-          <p:cNvPr id="39" name="TextBox 38"/>
+          <p:cNvPr id="41" name="TextBox 40"/>
           <p:cNvSpPr txBox="1"/>
           <p:nvPr/>
         </p:nvSpPr>
         <p:spPr>
           <a:xfrm>
-            <a:off x="731520" y="22768560"/>
+            <a:off x="731520" y="24042116"/>
             <a:ext cx="10607040" cy="365760"/>
           </a:xfrm>
           <a:prstGeom prst="rect">
@@ -4684,13 +4768,13 @@
       </p:sp>
       <p:sp>
         <p:nvSpPr>
-          <p:cNvPr id="40" name="Rectangle 39"/>
+          <p:cNvPr id="42" name="Rectangle 41"/>
           <p:cNvSpPr/>
           <p:nvPr/>
         </p:nvSpPr>
         <p:spPr>
           <a:xfrm>
-            <a:off x="731520" y="23329900"/>
+            <a:off x="731520" y="24603456"/>
             <a:ext cx="10607040" cy="27432"/>
           </a:xfrm>
           <a:prstGeom prst="rect">
@@ -4728,13 +4812,13 @@
       </p:sp>
       <p:sp>
         <p:nvSpPr>
-          <p:cNvPr id="41" name="TextBox 40"/>
+          <p:cNvPr id="43" name="TextBox 42"/>
           <p:cNvSpPr txBox="1"/>
           <p:nvPr/>
         </p:nvSpPr>
         <p:spPr>
           <a:xfrm>
-            <a:off x="731520" y="23659084"/>
+            <a:off x="731520" y="24932640"/>
             <a:ext cx="10607040" cy="365760"/>
           </a:xfrm>
           <a:prstGeom prst="rect">
@@ -4770,13 +4854,13 @@
       </p:sp>
       <p:sp>
         <p:nvSpPr>
-          <p:cNvPr id="42" name="TextBox 41"/>
+          <p:cNvPr id="44" name="TextBox 43"/>
           <p:cNvSpPr txBox="1"/>
           <p:nvPr/>
         </p:nvSpPr>
         <p:spPr>
           <a:xfrm>
-            <a:off x="731520" y="25770332"/>
+            <a:off x="731520" y="27043888"/>
             <a:ext cx="10607040" cy="365760"/>
           </a:xfrm>
           <a:prstGeom prst="rect">
@@ -4812,13 +4896,13 @@
       </p:sp>
       <p:sp>
         <p:nvSpPr>
-          <p:cNvPr id="43" name="Rectangle 42"/>
+          <p:cNvPr id="45" name="Rectangle 44"/>
           <p:cNvSpPr/>
           <p:nvPr/>
         </p:nvSpPr>
         <p:spPr>
           <a:xfrm>
-            <a:off x="731520" y="26331672"/>
+            <a:off x="731520" y="27605228"/>
             <a:ext cx="10607040" cy="27432"/>
           </a:xfrm>
           <a:prstGeom prst="rect">
@@ -4856,13 +4940,13 @@
       </p:sp>
       <p:sp>
         <p:nvSpPr>
-          <p:cNvPr id="44" name="TextBox 43"/>
+          <p:cNvPr id="46" name="TextBox 45"/>
           <p:cNvSpPr txBox="1"/>
           <p:nvPr/>
         </p:nvSpPr>
         <p:spPr>
           <a:xfrm>
-            <a:off x="731520" y="26660856"/>
+            <a:off x="731520" y="27934412"/>
             <a:ext cx="10607040" cy="365760"/>
           </a:xfrm>
           <a:prstGeom prst="rect">
@@ -4891,14 +4975,14 @@
                 </a:solidFill>
                 <a:latin typeface="Arial"/>
               </a:rPr>
-              <a:t>A new robot needs a project, an API key and a session start. The ingest contract is the same for every vehicle: start a session, post sensor batches and frames while driving, stop. The platform does not care what the robot is. The Unitree humanoid's project exists on this basis and is waiting on its first upload.</a:t>
-            </a:r>
-          </a:p>
-        </p:txBody>
-      </p:sp>
-      <p:sp>
-        <p:nvSpPr>
-          <p:cNvPr id="45" name="TextBox 44"/>
+              <a:t>A new robot needs a project, an API key and a session start. The ingest contract is the same for every vehicle: open a session, post sensor batches and frames while driving, stop. The platform does not care what the robot is. Empty projects for a mobile robot and a humanoid already sit on it, waiting for a first upload.</a:t>
+            </a:r>
+          </a:p>
+        </p:txBody>
+      </p:sp>
+      <p:sp>
+        <p:nvSpPr>
+          <p:cNvPr id="47" name="TextBox 46"/>
           <p:cNvSpPr txBox="1"/>
           <p:nvPr/>
         </p:nvSpPr>
@@ -4940,7 +5024,7 @@
       </p:sp>
       <p:sp>
         <p:nvSpPr>
-          <p:cNvPr id="46" name="Rectangle 45"/>
+          <p:cNvPr id="48" name="Rectangle 47"/>
           <p:cNvSpPr/>
           <p:nvPr/>
         </p:nvSpPr>
@@ -4984,7 +5068,7 @@
       </p:sp>
       <p:sp>
         <p:nvSpPr>
-          <p:cNvPr id="47" name="TextBox 46"/>
+          <p:cNvPr id="49" name="TextBox 48"/>
           <p:cNvSpPr txBox="1"/>
           <p:nvPr/>
         </p:nvSpPr>
@@ -5019,14 +5103,14 @@
                 </a:solidFill>
                 <a:latin typeface="Arial"/>
               </a:rPr>
-              <a:t>Robot 241 is a tracked rover that drives crop rows and streams camera, GPS and two IMUs. The laser cart carries the weeder: a galvanometer laser, a down camera over the work zone and a forward camera. A Unitree humanoid has a project and has uploaded nothing yet. Between them the two ground vehicles have recorded 2,686 frames in 26 drives.</a:t>
-            </a:r>
-          </a:p>
-        </p:txBody>
-      </p:sp>
-      <p:sp>
-        <p:nvSpPr>
-          <p:cNvPr id="48" name="TextBox 47"/>
+              <a:t>Robot 241 is a tracked rover that drives crop rows and streams camera, GPS and two IMUs. The laser cart carries the weeder: a galvanometer laser, a down camera over the work zone and a forward camera. Ten projects sit on the platform and two of them have a robot reporting into them. Between those two vehicles, 2,686 frames in 26 drives.</a:t>
+            </a:r>
+          </a:p>
+        </p:txBody>
+      </p:sp>
+      <p:sp>
+        <p:nvSpPr>
+          <p:cNvPr id="50" name="TextBox 49"/>
           <p:cNvSpPr txBox="1"/>
           <p:nvPr/>
         </p:nvSpPr>
@@ -5055,6 +5139,90 @@
               </a:spcAft>
             </a:pPr>
             <a:r>
+              <a:rPr sz="6200" b="1">
+                <a:solidFill>
+                  <a:srgbClr val="1C6FB5"/>
+                </a:solidFill>
+                <a:latin typeface="Arial Narrow"/>
+              </a:rPr>
+              <a:t>14</a:t>
+            </a:r>
+          </a:p>
+        </p:txBody>
+      </p:sp>
+      <p:sp>
+        <p:nvSpPr>
+          <p:cNvPr id="51" name="TextBox 50"/>
+          <p:cNvSpPr txBox="1"/>
+          <p:nvPr/>
+        </p:nvSpPr>
+        <p:spPr>
+          <a:xfrm>
+            <a:off x="11704320" y="11738864"/>
+            <a:ext cx="10607040" cy="365760"/>
+          </a:xfrm>
+          <a:prstGeom prst="rect">
+            <a:avLst/>
+          </a:prstGeom>
+          <a:noFill/>
+        </p:spPr>
+        <p:txBody>
+          <a:bodyPr wrap="square" lIns="0" rIns="0" tIns="0" bIns="0">
+            <a:spAutoFit/>
+          </a:bodyPr>
+          <a:lstStyle/>
+          <a:p>
+            <a:pPr algn="l">
+              <a:lnSpc>
+                <a:spcPct val="122000"/>
+              </a:lnSpc>
+              <a:spcAft>
+                <a:spcPts val="600"/>
+              </a:spcAft>
+            </a:pPr>
+            <a:r>
+              <a:rPr sz="1600" b="0">
+                <a:solidFill>
+                  <a:srgbClr val="556575"/>
+                </a:solidFill>
+                <a:latin typeface="Arial"/>
+              </a:rPr>
+              <a:t>analysis tools the planner can choose from</a:t>
+            </a:r>
+          </a:p>
+        </p:txBody>
+      </p:sp>
+      <p:sp>
+        <p:nvSpPr>
+          <p:cNvPr id="52" name="TextBox 51"/>
+          <p:cNvSpPr txBox="1"/>
+          <p:nvPr/>
+        </p:nvSpPr>
+        <p:spPr>
+          <a:xfrm>
+            <a:off x="11704320" y="12209272"/>
+            <a:ext cx="10607040" cy="365760"/>
+          </a:xfrm>
+          <a:prstGeom prst="rect">
+            <a:avLst/>
+          </a:prstGeom>
+          <a:noFill/>
+        </p:spPr>
+        <p:txBody>
+          <a:bodyPr wrap="square" lIns="0" rIns="0" tIns="0" bIns="0">
+            <a:spAutoFit/>
+          </a:bodyPr>
+          <a:lstStyle/>
+          <a:p>
+            <a:pPr algn="l">
+              <a:lnSpc>
+                <a:spcPct val="95000"/>
+              </a:lnSpc>
+              <a:spcAft>
+                <a:spcPts val="0"/>
+              </a:spcAft>
+            </a:pPr>
+            <a:r>
               <a:rPr sz="3400" b="1">
                 <a:solidFill>
                   <a:srgbClr val="14314E"/>
@@ -5068,13 +5236,13 @@
       </p:sp>
       <p:sp>
         <p:nvSpPr>
-          <p:cNvPr id="49" name="Rectangle 48"/>
+          <p:cNvPr id="53" name="Rectangle 52"/>
           <p:cNvSpPr/>
           <p:nvPr/>
         </p:nvSpPr>
         <p:spPr>
           <a:xfrm>
-            <a:off x="11704320" y="11497056"/>
+            <a:off x="11704320" y="12770612"/>
             <a:ext cx="10607040" cy="27432"/>
           </a:xfrm>
           <a:prstGeom prst="rect">
@@ -5112,13 +5280,13 @@
       </p:sp>
       <p:sp>
         <p:nvSpPr>
-          <p:cNvPr id="50" name="TextBox 49"/>
+          <p:cNvPr id="54" name="TextBox 53"/>
           <p:cNvSpPr txBox="1"/>
           <p:nvPr/>
         </p:nvSpPr>
         <p:spPr>
           <a:xfrm>
-            <a:off x="11704320" y="11826239"/>
+            <a:off x="11704320" y="13099796"/>
             <a:ext cx="10607040" cy="365760"/>
           </a:xfrm>
           <a:prstGeom prst="rect">
@@ -5154,13 +5322,13 @@
       </p:sp>
       <p:sp>
         <p:nvSpPr>
-          <p:cNvPr id="51" name="TextBox 50"/>
+          <p:cNvPr id="55" name="TextBox 54"/>
           <p:cNvSpPr txBox="1"/>
           <p:nvPr/>
         </p:nvSpPr>
         <p:spPr>
           <a:xfrm>
-            <a:off x="11704320" y="13627607"/>
+            <a:off x="11704320" y="14901164"/>
             <a:ext cx="10607040" cy="365760"/>
           </a:xfrm>
           <a:prstGeom prst="rect">
@@ -5196,13 +5364,13 @@
       </p:sp>
       <p:sp>
         <p:nvSpPr>
-          <p:cNvPr id="52" name="Rectangle 51"/>
+          <p:cNvPr id="56" name="Rectangle 55"/>
           <p:cNvSpPr/>
           <p:nvPr/>
         </p:nvSpPr>
         <p:spPr>
           <a:xfrm>
-            <a:off x="11704320" y="14188947"/>
+            <a:off x="11704320" y="15462504"/>
             <a:ext cx="10607040" cy="27432"/>
           </a:xfrm>
           <a:prstGeom prst="rect">
@@ -5240,13 +5408,13 @@
       </p:sp>
       <p:sp>
         <p:nvSpPr>
-          <p:cNvPr id="53" name="TextBox 52"/>
+          <p:cNvPr id="57" name="TextBox 56"/>
           <p:cNvSpPr txBox="1"/>
           <p:nvPr/>
         </p:nvSpPr>
         <p:spPr>
           <a:xfrm>
-            <a:off x="11704320" y="14518131"/>
+            <a:off x="11704320" y="15791688"/>
             <a:ext cx="10607040" cy="365760"/>
           </a:xfrm>
           <a:prstGeom prst="rect">
@@ -5282,13 +5450,13 @@
       </p:sp>
       <p:sp>
         <p:nvSpPr>
-          <p:cNvPr id="54" name="TextBox 53"/>
+          <p:cNvPr id="58" name="TextBox 57"/>
           <p:cNvSpPr txBox="1"/>
           <p:nvPr/>
         </p:nvSpPr>
         <p:spPr>
           <a:xfrm>
-            <a:off x="11704320" y="16009620"/>
+            <a:off x="11704320" y="17283176"/>
             <a:ext cx="10607040" cy="365760"/>
           </a:xfrm>
           <a:prstGeom prst="rect">
@@ -5311,6 +5479,90 @@
               </a:spcAft>
             </a:pPr>
             <a:r>
+              <a:rPr sz="6200" b="1">
+                <a:solidFill>
+                  <a:srgbClr val="1C6FB5"/>
+                </a:solidFill>
+                <a:latin typeface="Arial Narrow"/>
+              </a:rPr>
+              <a:t>92</a:t>
+            </a:r>
+          </a:p>
+        </p:txBody>
+      </p:sp>
+      <p:sp>
+        <p:nvSpPr>
+          <p:cNvPr id="59" name="TextBox 58"/>
+          <p:cNvSpPr txBox="1"/>
+          <p:nvPr/>
+        </p:nvSpPr>
+        <p:spPr>
+          <a:xfrm>
+            <a:off x="11704320" y="18086324"/>
+            <a:ext cx="10607040" cy="365760"/>
+          </a:xfrm>
+          <a:prstGeom prst="rect">
+            <a:avLst/>
+          </a:prstGeom>
+          <a:noFill/>
+        </p:spPr>
+        <p:txBody>
+          <a:bodyPr wrap="square" lIns="0" rIns="0" tIns="0" bIns="0">
+            <a:spAutoFit/>
+          </a:bodyPr>
+          <a:lstStyle/>
+          <a:p>
+            <a:pPr algn="l">
+              <a:lnSpc>
+                <a:spcPct val="122000"/>
+              </a:lnSpc>
+              <a:spcAft>
+                <a:spcPts val="600"/>
+              </a:spcAft>
+            </a:pPr>
+            <a:r>
+              <a:rPr sz="1600" b="0">
+                <a:solidFill>
+                  <a:srgbClr val="556575"/>
+                </a:solidFill>
+                <a:latin typeface="Arial"/>
+              </a:rPr>
+              <a:t>questions asked of a dataset so far</a:t>
+            </a:r>
+          </a:p>
+        </p:txBody>
+      </p:sp>
+      <p:sp>
+        <p:nvSpPr>
+          <p:cNvPr id="60" name="TextBox 59"/>
+          <p:cNvSpPr txBox="1"/>
+          <p:nvPr/>
+        </p:nvSpPr>
+        <p:spPr>
+          <a:xfrm>
+            <a:off x="11704320" y="18556732"/>
+            <a:ext cx="10607040" cy="365760"/>
+          </a:xfrm>
+          <a:prstGeom prst="rect">
+            <a:avLst/>
+          </a:prstGeom>
+          <a:noFill/>
+        </p:spPr>
+        <p:txBody>
+          <a:bodyPr wrap="square" lIns="0" rIns="0" tIns="0" bIns="0">
+            <a:spAutoFit/>
+          </a:bodyPr>
+          <a:lstStyle/>
+          <a:p>
+            <a:pPr algn="l">
+              <a:lnSpc>
+                <a:spcPct val="95000"/>
+              </a:lnSpc>
+              <a:spcAft>
+                <a:spcPts val="0"/>
+              </a:spcAft>
+            </a:pPr>
+            <a:r>
               <a:rPr sz="3400" b="1">
                 <a:solidFill>
                   <a:srgbClr val="14314E"/>
@@ -5324,13 +5576,13 @@
       </p:sp>
       <p:sp>
         <p:nvSpPr>
-          <p:cNvPr id="55" name="Rectangle 54"/>
+          <p:cNvPr id="61" name="Rectangle 60"/>
           <p:cNvSpPr/>
           <p:nvPr/>
         </p:nvSpPr>
         <p:spPr>
           <a:xfrm>
-            <a:off x="11704320" y="16570959"/>
+            <a:off x="11704320" y="19118072"/>
             <a:ext cx="10607040" cy="27432"/>
           </a:xfrm>
           <a:prstGeom prst="rect">
@@ -5368,13 +5620,13 @@
       </p:sp>
       <p:sp>
         <p:nvSpPr>
-          <p:cNvPr id="56" name="TextBox 55"/>
+          <p:cNvPr id="62" name="TextBox 61"/>
           <p:cNvSpPr txBox="1"/>
           <p:nvPr/>
         </p:nvSpPr>
         <p:spPr>
           <a:xfrm>
-            <a:off x="11704320" y="16900143"/>
+            <a:off x="11704320" y="19447256"/>
             <a:ext cx="10607040" cy="365760"/>
           </a:xfrm>
           <a:prstGeom prst="rect">
@@ -5410,13 +5662,13 @@
       </p:sp>
       <p:sp>
         <p:nvSpPr>
-          <p:cNvPr id="57" name="TextBox 56"/>
+          <p:cNvPr id="63" name="TextBox 62"/>
           <p:cNvSpPr txBox="1"/>
           <p:nvPr/>
         </p:nvSpPr>
         <p:spPr>
           <a:xfrm>
-            <a:off x="11704320" y="18701512"/>
+            <a:off x="11704320" y="21248624"/>
             <a:ext cx="10607040" cy="365760"/>
           </a:xfrm>
           <a:prstGeom prst="rect">
@@ -5452,13 +5704,13 @@
       </p:sp>
       <p:sp>
         <p:nvSpPr>
-          <p:cNvPr id="58" name="Rectangle 57"/>
+          <p:cNvPr id="64" name="Rectangle 63"/>
           <p:cNvSpPr/>
           <p:nvPr/>
         </p:nvSpPr>
         <p:spPr>
           <a:xfrm>
-            <a:off x="11704320" y="19262852"/>
+            <a:off x="11704320" y="21809964"/>
             <a:ext cx="10607040" cy="27432"/>
           </a:xfrm>
           <a:prstGeom prst="rect">
@@ -5496,13 +5748,13 @@
       </p:sp>
       <p:sp>
         <p:nvSpPr>
-          <p:cNvPr id="59" name="TextBox 58"/>
+          <p:cNvPr id="65" name="TextBox 64"/>
           <p:cNvSpPr txBox="1"/>
           <p:nvPr/>
         </p:nvSpPr>
         <p:spPr>
           <a:xfrm>
-            <a:off x="11704320" y="19592036"/>
+            <a:off x="11704320" y="22139148"/>
             <a:ext cx="10607040" cy="365760"/>
           </a:xfrm>
           <a:prstGeom prst="rect">
@@ -5538,14 +5790,14 @@
       </p:sp>
       <p:sp>
         <p:nvSpPr>
-          <p:cNvPr id="60" name="TextBox 59"/>
+          <p:cNvPr id="66" name="TextBox 65"/>
           <p:cNvSpPr txBox="1"/>
           <p:nvPr/>
         </p:nvSpPr>
         <p:spPr>
           <a:xfrm>
-            <a:off x="11704320" y="21393404"/>
-            <a:ext cx="10607040" cy="365760"/>
+            <a:off x="22677120" y="7933943"/>
+            <a:ext cx="20482560" cy="365760"/>
           </a:xfrm>
           <a:prstGeom prst="rect">
             <a:avLst/>
@@ -5573,21 +5825,21 @@
                 </a:solidFill>
                 <a:latin typeface="Arial Narrow"/>
               </a:rPr>
-              <a:t>213 seconds in one crop plot</a:t>
-            </a:r>
-          </a:p>
-        </p:txBody>
-      </p:sp>
-      <p:sp>
-        <p:nvSpPr>
-          <p:cNvPr id="61" name="Rectangle 60"/>
+              <a:t>A drive becomes a dataset as it opens</a:t>
+            </a:r>
+          </a:p>
+        </p:txBody>
+      </p:sp>
+      <p:sp>
+        <p:nvSpPr>
+          <p:cNvPr id="67" name="Rectangle 66"/>
           <p:cNvSpPr/>
           <p:nvPr/>
         </p:nvSpPr>
         <p:spPr>
           <a:xfrm>
-            <a:off x="11704320" y="21954744"/>
-            <a:ext cx="10607040" cy="27432"/>
+            <a:off x="22677120" y="8495284"/>
+            <a:ext cx="20482560" cy="27432"/>
           </a:xfrm>
           <a:prstGeom prst="rect">
             <a:avLst/>
@@ -5622,82 +5874,16 @@
           </a:p>
         </p:txBody>
       </p:sp>
-      <p:pic>
-        <p:nvPicPr>
-          <p:cNvPr id="62" name="Picture 61" descr="h_drive.png"/>
-          <p:cNvPicPr>
-            <a:picLocks noChangeAspect="1"/>
-          </p:cNvPicPr>
-          <p:nvPr/>
-        </p:nvPicPr>
-        <p:blipFill>
-          <a:blip r:embed="rId3"/>
-          <a:stretch>
-            <a:fillRect/>
-          </a:stretch>
-        </p:blipFill>
-        <p:spPr>
-          <a:xfrm>
-            <a:off x="11704320" y="22283928"/>
-            <a:ext cx="10607040" cy="4023360"/>
-          </a:xfrm>
-          <a:prstGeom prst="rect">
-            <a:avLst/>
-          </a:prstGeom>
-        </p:spPr>
-      </p:pic>
-      <p:sp>
-        <p:nvSpPr>
-          <p:cNvPr id="63" name="TextBox 62"/>
+      <p:sp>
+        <p:nvSpPr>
+          <p:cNvPr id="68" name="TextBox 67"/>
           <p:cNvSpPr txBox="1"/>
           <p:nvPr/>
         </p:nvSpPr>
         <p:spPr>
           <a:xfrm>
-            <a:off x="11704320" y="26417016"/>
-            <a:ext cx="10607040" cy="365760"/>
-          </a:xfrm>
-          <a:prstGeom prst="rect">
-            <a:avLst/>
-          </a:prstGeom>
-          <a:noFill/>
-        </p:spPr>
-        <p:txBody>
-          <a:bodyPr wrap="square" lIns="0" rIns="0" tIns="0" bIns="0">
-            <a:spAutoFit/>
-          </a:bodyPr>
-          <a:lstStyle/>
-          <a:p>
-            <a:pPr algn="l">
-              <a:lnSpc>
-                <a:spcPct val="118000"/>
-              </a:lnSpc>
-              <a:spcAft>
-                <a:spcPts val="0"/>
-              </a:spcAft>
-            </a:pPr>
-            <a:r>
-              <a:rPr sz="1600" b="0">
-                <a:solidFill>
-                  <a:srgbClr val="556575"/>
-                </a:solidFill>
-                <a:latin typeface="Arial"/>
-              </a:rPr>
-              <a:t>Figure 2.  Robot 241, 2026-08-29: one 213 s pass through a crop plot. (h) GPS track from the board fix. (i) IMU heading over the same pass.</a:t>
-            </a:r>
-          </a:p>
-        </p:txBody>
-      </p:sp>
-      <p:sp>
-        <p:nvSpPr>
-          <p:cNvPr id="64" name="TextBox 63"/>
-          <p:cNvSpPr txBox="1"/>
-          <p:nvPr/>
-        </p:nvSpPr>
-        <p:spPr>
-          <a:xfrm>
-            <a:off x="11704320" y="27207464"/>
-            <a:ext cx="10607040" cy="365760"/>
+            <a:off x="22677120" y="8824467"/>
+            <a:ext cx="20482560" cy="365760"/>
           </a:xfrm>
           <a:prstGeom prst="rect">
             <a:avLst/>
@@ -5725,20 +5911,20 @@
                 </a:solidFill>
                 <a:latin typeface="Arial"/>
               </a:rPr>
-              <a:t>The longest single pass the platform holds: 141 m of track from 211 fixes, with heading from the IMU over the same 213 seconds. The platform holds 18 passes that carry position.</a:t>
-            </a:r>
-          </a:p>
-        </p:txBody>
-      </p:sp>
-      <p:sp>
-        <p:nvSpPr>
-          <p:cNvPr id="65" name="TextBox 64"/>
+              <a:t>A vehicle opens a session and the platform registers it as a governed dataset at that moment, not after the drive ends. Frames and sensor batches arrive over one API key. Robot 241 sends camera, GPS and two IMUs; the laser cart sends camera, laser state, vehicle telemetry and its own detections, and no position at all.</a:t>
+            </a:r>
+          </a:p>
+        </p:txBody>
+      </p:sp>
+      <p:sp>
+        <p:nvSpPr>
+          <p:cNvPr id="69" name="TextBox 68"/>
           <p:cNvSpPr txBox="1"/>
           <p:nvPr/>
         </p:nvSpPr>
         <p:spPr>
           <a:xfrm>
-            <a:off x="22677120" y="7933943"/>
+            <a:off x="22677120" y="10006075"/>
             <a:ext cx="20482560" cy="365760"/>
           </a:xfrm>
           <a:prstGeom prst="rect">
@@ -5767,20 +5953,20 @@
                 </a:solidFill>
                 <a:latin typeface="Arial Narrow"/>
               </a:rPr>
-              <a:t>A drive becomes a dataset as it opens</a:t>
-            </a:r>
-          </a:p>
-        </p:txBody>
-      </p:sp>
-      <p:sp>
-        <p:nvSpPr>
-          <p:cNvPr id="66" name="Rectangle 65"/>
+              <a:t>Left alone for fifteen rounds</a:t>
+            </a:r>
+          </a:p>
+        </p:txBody>
+      </p:sp>
+      <p:sp>
+        <p:nvSpPr>
+          <p:cNvPr id="70" name="Rectangle 69"/>
           <p:cNvSpPr/>
           <p:nvPr/>
         </p:nvSpPr>
         <p:spPr>
           <a:xfrm>
-            <a:off x="22677120" y="8495284"/>
+            <a:off x="22677120" y="10567415"/>
             <a:ext cx="20482560" cy="27432"/>
           </a:xfrm>
           <a:prstGeom prst="rect">
@@ -5816,15 +6002,81 @@
           </a:p>
         </p:txBody>
       </p:sp>
-      <p:sp>
-        <p:nvSpPr>
-          <p:cNvPr id="67" name="TextBox 66"/>
+      <p:pic>
+        <p:nvPicPr>
+          <p:cNvPr id="71" name="Picture 70" descr="f_rounds.png"/>
+          <p:cNvPicPr>
+            <a:picLocks noChangeAspect="1"/>
+          </p:cNvPicPr>
+          <p:nvPr/>
+        </p:nvPicPr>
+        <p:blipFill>
+          <a:blip r:embed="rId3"/>
+          <a:stretch>
+            <a:fillRect/>
+          </a:stretch>
+        </p:blipFill>
+        <p:spPr>
+          <a:xfrm>
+            <a:off x="22677120" y="10896599"/>
+            <a:ext cx="20482560" cy="4663440"/>
+          </a:xfrm>
+          <a:prstGeom prst="rect">
+            <a:avLst/>
+          </a:prstGeom>
+        </p:spPr>
+      </p:pic>
+      <p:sp>
+        <p:nvSpPr>
+          <p:cNvPr id="72" name="TextBox 71"/>
           <p:cNvSpPr txBox="1"/>
           <p:nvPr/>
         </p:nvSpPr>
         <p:spPr>
           <a:xfrm>
-            <a:off x="22677120" y="8824467"/>
+            <a:off x="22677120" y="15669768"/>
+            <a:ext cx="20482560" cy="365760"/>
+          </a:xfrm>
+          <a:prstGeom prst="rect">
+            <a:avLst/>
+          </a:prstGeom>
+          <a:noFill/>
+        </p:spPr>
+        <p:txBody>
+          <a:bodyPr wrap="square" lIns="0" rIns="0" tIns="0" bIns="0">
+            <a:spAutoFit/>
+          </a:bodyPr>
+          <a:lstStyle/>
+          <a:p>
+            <a:pPr algn="l">
+              <a:lnSpc>
+                <a:spcPct val="118000"/>
+              </a:lnSpc>
+              <a:spcAft>
+                <a:spcPts val="0"/>
+              </a:spcAft>
+            </a:pPr>
+            <a:r>
+              <a:rPr sz="1600" b="0">
+                <a:solidFill>
+                  <a:srgbClr val="556575"/>
+                </a:solidFill>
+                <a:latin typeface="Arial"/>
+              </a:rPr>
+              <a:t>Figure 2.  (f) Fifteen unattended rounds on a fixed holdout. (g) Round 15's exact dataset, three ways. The first two marks differ only in the starting weights, so their gap is the warm-start chain; the third is the recipe the campaign ran, whose wall-clock cap truncates the cosine, with its three seeds drawn behind it. Sigma throughout is that recipe's own seed spread, 0.0040 over three seeds, propagated to the difference being quoted. Completing the schedule is not the fix -- the second mark sits below the third.</a:t>
+            </a:r>
+          </a:p>
+        </p:txBody>
+      </p:sp>
+      <p:sp>
+        <p:nvSpPr>
+          <p:cNvPr id="73" name="TextBox 72"/>
+          <p:cNvSpPr txBox="1"/>
+          <p:nvPr/>
+        </p:nvSpPr>
+        <p:spPr>
+          <a:xfrm>
+            <a:off x="22677120" y="16699991"/>
             <a:ext cx="20482560" cy="365760"/>
           </a:xfrm>
           <a:prstGeom prst="rect">
@@ -5853,20 +6105,20 @@
                 </a:solidFill>
                 <a:latin typeface="Arial"/>
               </a:rPr>
-              <a:t>A vehicle opens a session and the platform registers it as a governed dataset at that moment, not after the drive ends. Frames and sensor batches arrive over one API key. Robot 241 sends camera, GPS and two IMUs; the laser cart sends camera, laser state, vehicle telemetry and its own detections, and no position at all.</a:t>
-            </a:r>
-          </a:p>
-        </p:txBody>
-      </p:sp>
-      <p:sp>
-        <p:nvSpPr>
-          <p:cNvPr id="68" name="TextBox 67"/>
+              <a:t>Two cluster jobs, one collecting and one training, ran fifteen rounds against the locked registry with nobody in the room. Each round searched public sources, filtered what it found, merged, trained and evaluated. Every round reported success. Accuracy fell for fifteen rounds. This part is built and is switched off today.</a:t>
+            </a:r>
+          </a:p>
+        </p:txBody>
+      </p:sp>
+      <p:sp>
+        <p:nvSpPr>
+          <p:cNvPr id="74" name="TextBox 73"/>
           <p:cNvSpPr txBox="1"/>
           <p:nvPr/>
         </p:nvSpPr>
         <p:spPr>
           <a:xfrm>
-            <a:off x="22677120" y="10006075"/>
+            <a:off x="22677120" y="18191480"/>
             <a:ext cx="20482560" cy="365760"/>
           </a:xfrm>
           <a:prstGeom prst="rect">
@@ -5889,26 +6141,110 @@
               </a:spcAft>
             </a:pPr>
             <a:r>
-              <a:rPr sz="3400" b="1">
-                <a:solidFill>
-                  <a:srgbClr val="14314E"/>
+              <a:rPr sz="6200" b="1">
+                <a:solidFill>
+                  <a:srgbClr val="1C6FB5"/>
                 </a:solidFill>
                 <a:latin typeface="Arial Narrow"/>
               </a:rPr>
-              <a:t>Left alone for fifteen rounds</a:t>
-            </a:r>
-          </a:p>
-        </p:txBody>
-      </p:sp>
-      <p:sp>
-        <p:nvSpPr>
-          <p:cNvPr id="69" name="Rectangle 68"/>
+              <a:t>27</a:t>
+            </a:r>
+          </a:p>
+        </p:txBody>
+      </p:sp>
+      <p:sp>
+        <p:nvSpPr>
+          <p:cNvPr id="75" name="TextBox 74"/>
+          <p:cNvSpPr txBox="1"/>
+          <p:nvPr/>
+        </p:nvSpPr>
+        <p:spPr>
+          <a:xfrm>
+            <a:off x="22677120" y="18994628"/>
+            <a:ext cx="20482560" cy="365760"/>
+          </a:xfrm>
+          <a:prstGeom prst="rect">
+            <a:avLst/>
+          </a:prstGeom>
+          <a:noFill/>
+        </p:spPr>
+        <p:txBody>
+          <a:bodyPr wrap="square" lIns="0" rIns="0" tIns="0" bIns="0">
+            <a:spAutoFit/>
+          </a:bodyPr>
+          <a:lstStyle/>
+          <a:p>
+            <a:pPr algn="l">
+              <a:lnSpc>
+                <a:spcPct val="122000"/>
+              </a:lnSpc>
+              <a:spcAft>
+                <a:spcPts val="600"/>
+              </a:spcAft>
+            </a:pPr>
+            <a:r>
+              <a:rPr sz="1600" b="0">
+                <a:solidFill>
+                  <a:srgbClr val="556575"/>
+                </a:solidFill>
+                <a:latin typeface="Arial"/>
+              </a:rPr>
+              <a:t>distinct models trained, run, or rejected</a:t>
+            </a:r>
+          </a:p>
+        </p:txBody>
+      </p:sp>
+      <p:sp>
+        <p:nvSpPr>
+          <p:cNvPr id="76" name="TextBox 75"/>
+          <p:cNvSpPr txBox="1"/>
+          <p:nvPr/>
+        </p:nvSpPr>
+        <p:spPr>
+          <a:xfrm>
+            <a:off x="22677120" y="19465036"/>
+            <a:ext cx="20482560" cy="365760"/>
+          </a:xfrm>
+          <a:prstGeom prst="rect">
+            <a:avLst/>
+          </a:prstGeom>
+          <a:noFill/>
+        </p:spPr>
+        <p:txBody>
+          <a:bodyPr wrap="square" lIns="0" rIns="0" tIns="0" bIns="0">
+            <a:spAutoFit/>
+          </a:bodyPr>
+          <a:lstStyle/>
+          <a:p>
+            <a:pPr algn="l">
+              <a:lnSpc>
+                <a:spcPct val="95000"/>
+              </a:lnSpc>
+              <a:spcAft>
+                <a:spcPts val="0"/>
+              </a:spcAft>
+            </a:pPr>
+            <a:r>
+              <a:rPr sz="3400" b="1">
+                <a:solidFill>
+                  <a:srgbClr val="14314E"/>
+                </a:solidFill>
+                <a:latin typeface="Arial Narrow"/>
+              </a:rPr>
+              <a:t>Everything we trained, ran, or rejected</a:t>
+            </a:r>
+          </a:p>
+        </p:txBody>
+      </p:sp>
+      <p:sp>
+        <p:nvSpPr>
+          <p:cNvPr id="77" name="Rectangle 76"/>
           <p:cNvSpPr/>
           <p:nvPr/>
         </p:nvSpPr>
         <p:spPr>
           <a:xfrm>
-            <a:off x="22677120" y="10567415"/>
+            <a:off x="22677120" y="20026376"/>
             <a:ext cx="20482560" cy="27432"/>
           </a:xfrm>
           <a:prstGeom prst="rect">
@@ -5946,7 +6282,7 @@
       </p:sp>
       <p:pic>
         <p:nvPicPr>
-          <p:cNvPr id="70" name="Picture 69" descr="f_rounds.png"/>
+          <p:cNvPr id="78" name="Picture 77" descr="m_ledger.png"/>
           <p:cNvPicPr>
             <a:picLocks noChangeAspect="1"/>
           </p:cNvPicPr>
@@ -5960,8 +6296,8 @@
         </p:blipFill>
         <p:spPr>
           <a:xfrm>
-            <a:off x="22677120" y="10896599"/>
-            <a:ext cx="20482560" cy="4663440"/>
+            <a:off x="22677120" y="20355560"/>
+            <a:ext cx="20482560" cy="3749040"/>
           </a:xfrm>
           <a:prstGeom prst="rect">
             <a:avLst/>
@@ -5970,13 +6306,13 @@
       </p:pic>
       <p:sp>
         <p:nvSpPr>
-          <p:cNvPr id="71" name="TextBox 70"/>
+          <p:cNvPr id="79" name="TextBox 78"/>
           <p:cNvSpPr txBox="1"/>
           <p:nvPr/>
         </p:nvSpPr>
         <p:spPr>
           <a:xfrm>
-            <a:off x="22677120" y="15669768"/>
+            <a:off x="22677120" y="24214328"/>
             <a:ext cx="20482560" cy="365760"/>
           </a:xfrm>
           <a:prstGeom prst="rect">
@@ -6005,20 +6341,20 @@
                 </a:solidFill>
                 <a:latin typeface="Arial"/>
               </a:rPr>
-              <a:t>Figure 3.  (f) Fifteen unattended rounds on a fixed holdout. (g) Round 15's exact dataset, three ways. The first two marks differ only in the starting weights, so their gap is the warm-start chain; the third is the recipe the campaign ran, whose wall-clock cap truncates the cosine, with its three seeds drawn behind it. Sigma throughout is that recipe's own seed spread, 0.0040 over three seeds, propagated to the difference being quoted. Completing the schedule is not the fix -- the second mark sits below the third.</a:t>
-            </a:r>
-          </a:p>
-        </p:txBody>
-      </p:sp>
-      <p:sp>
-        <p:nvSpPr>
-          <p:cNvPr id="72" name="TextBox 71"/>
+              <a:t>Figure 3.  30 rows in four families, which is 27 distinct models: OWLv2-large and Qwen2.5-7B each appear twice because each does two jobs here. One model is deployed. The zero-shot column is a single deterministic pass per model with no repeats, scored as mAP50 on the 848-image split; the reviewer column is the 149-case dev split, and two of its arms are still running. RF-DETR's score is on a third scale and is never differenced against the rows above it: the one measured offset between two of our evaluators, 0.0239, is larger than the gap on display.</a:t>
+            </a:r>
+          </a:p>
+        </p:txBody>
+      </p:sp>
+      <p:sp>
+        <p:nvSpPr>
+          <p:cNvPr id="80" name="TextBox 79"/>
           <p:cNvSpPr txBox="1"/>
           <p:nvPr/>
         </p:nvSpPr>
         <p:spPr>
           <a:xfrm>
-            <a:off x="22677120" y="16699991"/>
+            <a:off x="22677120" y="25244552"/>
             <a:ext cx="20482560" cy="365760"/>
           </a:xfrm>
           <a:prstGeom prst="rect">
@@ -6047,69 +6383,27 @@
                 </a:solidFill>
                 <a:latin typeface="Arial"/>
               </a:rPr>
-              <a:t>Two cluster jobs, one collecting and one training, ran fifteen rounds against the locked registry with nobody in the room. Each round searched public sources, filtered what it found, merged, trained and evaluated. Every round reported success. Accuracy fell for fifteen rounds. This part is built and is switched off today.</a:t>
-            </a:r>
-          </a:p>
-        </p:txBody>
-      </p:sp>
-      <p:sp>
-        <p:nvSpPr>
-          <p:cNvPr id="73" name="TextBox 72"/>
-          <p:cNvSpPr txBox="1"/>
-          <p:nvPr/>
-        </p:nvSpPr>
-        <p:spPr>
-          <a:xfrm>
-            <a:off x="22677120" y="18191480"/>
-            <a:ext cx="20482560" cy="365760"/>
-          </a:xfrm>
-          <a:prstGeom prst="rect">
-            <a:avLst/>
-          </a:prstGeom>
-          <a:noFill/>
-        </p:spPr>
-        <p:txBody>
-          <a:bodyPr wrap="square" lIns="0" rIns="0" tIns="0" bIns="0">
-            <a:spAutoFit/>
-          </a:bodyPr>
-          <a:lstStyle/>
-          <a:p>
-            <a:pPr algn="l">
-              <a:lnSpc>
-                <a:spcPct val="95000"/>
-              </a:lnSpc>
-              <a:spcAft>
-                <a:spcPts val="0"/>
-              </a:spcAft>
-            </a:pPr>
-            <a:r>
-              <a:rPr sz="3400" b="1">
-                <a:solidFill>
-                  <a:srgbClr val="14314E"/>
-                </a:solidFill>
-                <a:latin typeface="Arial Narrow"/>
-              </a:rPr>
-              <a:t>Everything we trained, ran, or rejected</a:t>
-            </a:r>
-          </a:p>
-        </p:txBody>
-      </p:sp>
-      <p:sp>
-        <p:nvSpPr>
-          <p:cNvPr id="74" name="Rectangle 73"/>
+              <a:t>Thirty rows in four families, which is 27 distinct models. Five detectors trained on our own holdout, two vision models inside the loop, fourteen vision-language models zero-shot, and nine language models as reviewers. One is deployed.</a:t>
+            </a:r>
+          </a:p>
+        </p:txBody>
+      </p:sp>
+      <p:sp>
+        <p:nvSpPr>
+          <p:cNvPr id="81" name="Rectangle 80"/>
           <p:cNvSpPr/>
           <p:nvPr/>
         </p:nvSpPr>
         <p:spPr>
           <a:xfrm>
-            <a:off x="22677120" y="18752820"/>
-            <a:ext cx="20482560" cy="27432"/>
+            <a:off x="731520" y="30632400"/>
+            <a:ext cx="42428160" cy="20116"/>
           </a:xfrm>
           <a:prstGeom prst="rect">
             <a:avLst/>
           </a:prstGeom>
           <a:solidFill>
-            <a:srgbClr val="1C6FB5"/>
+            <a:srgbClr val="C2CEDA"/>
           </a:solidFill>
           <a:ln>
             <a:noFill/>
@@ -6138,161 +6432,9 @@
           </a:p>
         </p:txBody>
       </p:sp>
-      <p:pic>
-        <p:nvPicPr>
-          <p:cNvPr id="75" name="Picture 74" descr="m_ledger.png"/>
-          <p:cNvPicPr>
-            <a:picLocks noChangeAspect="1"/>
-          </p:cNvPicPr>
-          <p:nvPr/>
-        </p:nvPicPr>
-        <p:blipFill>
-          <a:blip r:embed="rId5"/>
-          <a:stretch>
-            <a:fillRect/>
-          </a:stretch>
-        </p:blipFill>
-        <p:spPr>
-          <a:xfrm>
-            <a:off x="22677120" y="19082004"/>
-            <a:ext cx="20482560" cy="3749040"/>
-          </a:xfrm>
-          <a:prstGeom prst="rect">
-            <a:avLst/>
-          </a:prstGeom>
-        </p:spPr>
-      </p:pic>
-      <p:sp>
-        <p:nvSpPr>
-          <p:cNvPr id="76" name="TextBox 75"/>
-          <p:cNvSpPr txBox="1"/>
-          <p:nvPr/>
-        </p:nvSpPr>
-        <p:spPr>
-          <a:xfrm>
-            <a:off x="22677120" y="22940772"/>
-            <a:ext cx="20482560" cy="365760"/>
-          </a:xfrm>
-          <a:prstGeom prst="rect">
-            <a:avLst/>
-          </a:prstGeom>
-          <a:noFill/>
-        </p:spPr>
-        <p:txBody>
-          <a:bodyPr wrap="square" lIns="0" rIns="0" tIns="0" bIns="0">
-            <a:spAutoFit/>
-          </a:bodyPr>
-          <a:lstStyle/>
-          <a:p>
-            <a:pPr algn="l">
-              <a:lnSpc>
-                <a:spcPct val="118000"/>
-              </a:lnSpc>
-              <a:spcAft>
-                <a:spcPts val="0"/>
-              </a:spcAft>
-            </a:pPr>
-            <a:r>
-              <a:rPr sz="1600" b="0">
-                <a:solidFill>
-                  <a:srgbClr val="556575"/>
-                </a:solidFill>
-                <a:latin typeface="Arial"/>
-              </a:rPr>
-              <a:t>Figure 4.  30 rows in four families, which is 27 distinct models: OWLv2-large and Qwen2.5-7B each appear twice because each does two jobs here. One model is deployed. The zero-shot column is a single deterministic pass per model with no repeats, scored as mAP50 on the 848-image split; the reviewer column is the 149-case dev split, and two of its arms are still running. RF-DETR's score is on a third scale and is never differenced against the rows above it: the one measured offset between two of our evaluators, 0.0239, is larger than the gap on display.</a:t>
-            </a:r>
-          </a:p>
-        </p:txBody>
-      </p:sp>
-      <p:sp>
-        <p:nvSpPr>
-          <p:cNvPr id="77" name="TextBox 76"/>
-          <p:cNvSpPr txBox="1"/>
-          <p:nvPr/>
-        </p:nvSpPr>
-        <p:spPr>
-          <a:xfrm>
-            <a:off x="22677120" y="23970996"/>
-            <a:ext cx="20482560" cy="365760"/>
-          </a:xfrm>
-          <a:prstGeom prst="rect">
-            <a:avLst/>
-          </a:prstGeom>
-          <a:noFill/>
-        </p:spPr>
-        <p:txBody>
-          <a:bodyPr wrap="square" lIns="0" rIns="0" tIns="0" bIns="0">
-            <a:spAutoFit/>
-          </a:bodyPr>
-          <a:lstStyle/>
-          <a:p>
-            <a:pPr algn="l">
-              <a:lnSpc>
-                <a:spcPct val="122000"/>
-              </a:lnSpc>
-              <a:spcAft>
-                <a:spcPts val="1400"/>
-              </a:spcAft>
-            </a:pPr>
-            <a:r>
-              <a:rPr sz="2000" b="0">
-                <a:solidFill>
-                  <a:srgbClr val="1E293B"/>
-                </a:solidFill>
-                <a:latin typeface="Arial"/>
-              </a:rPr>
-              <a:t>Thirty rows in four families, which is 27 distinct models. Five detectors trained on our own holdout, two vision models inside the loop, fourteen vision-language models zero-shot, and nine language models as reviewers. One is deployed.</a:t>
-            </a:r>
-          </a:p>
-        </p:txBody>
-      </p:sp>
-      <p:sp>
-        <p:nvSpPr>
-          <p:cNvPr id="78" name="Rectangle 77"/>
-          <p:cNvSpPr/>
-          <p:nvPr/>
-        </p:nvSpPr>
-        <p:spPr>
-          <a:xfrm>
-            <a:off x="731520" y="30632400"/>
-            <a:ext cx="42428160" cy="20116"/>
-          </a:xfrm>
-          <a:prstGeom prst="rect">
-            <a:avLst/>
-          </a:prstGeom>
-          <a:solidFill>
-            <a:srgbClr val="C2CEDA"/>
-          </a:solidFill>
-          <a:ln>
-            <a:noFill/>
-          </a:ln>
-          <a:effectLst/>
-        </p:spPr>
-        <p:style>
-          <a:lnRef idx="1">
-            <a:schemeClr val="accent1"/>
-          </a:lnRef>
-          <a:fillRef idx="3">
-            <a:schemeClr val="accent1"/>
-          </a:fillRef>
-          <a:effectRef idx="2">
-            <a:schemeClr val="accent1"/>
-          </a:effectRef>
-          <a:fontRef idx="minor">
-            <a:schemeClr val="lt1"/>
-          </a:fontRef>
-        </p:style>
-        <p:txBody>
-          <a:bodyPr rtlCol="0" anchor="ctr"/>
-          <a:lstStyle/>
-          <a:p>
-            <a:pPr algn="ctr"/>
-          </a:p>
-        </p:txBody>
-      </p:sp>
-      <p:sp>
-        <p:nvSpPr>
-          <p:cNvPr id="79" name="TextBox 78"/>
+      <p:sp>
+        <p:nvSpPr>
+          <p:cNvPr id="82" name="TextBox 81"/>
           <p:cNvSpPr txBox="1"/>
           <p:nvPr/>
         </p:nvSpPr>
@@ -6334,7 +6476,7 @@
       </p:sp>
       <p:sp>
         <p:nvSpPr>
-          <p:cNvPr id="80" name="TextBox 79"/>
+          <p:cNvPr id="83" name="TextBox 82"/>
           <p:cNvSpPr txBox="1"/>
           <p:nvPr/>
         </p:nvSpPr>
@@ -6376,7 +6518,7 @@
       </p:sp>
       <p:sp>
         <p:nvSpPr>
-          <p:cNvPr id="81" name="TextBox 80"/>
+          <p:cNvPr id="84" name="TextBox 83"/>
           <p:cNvSpPr txBox="1"/>
           <p:nvPr/>
         </p:nvSpPr>
